--- a/others/sprint2/Sprint_Review2_411_5.pptx
+++ b/others/sprint2/Sprint_Review2_411_5.pptx
@@ -517,7 +517,7 @@
           <a:p>
             <a:fld id="{F79ECDAD-75E1-4BC4-AB86-9BA5DFF857B3}" type="datetimeFigureOut">
               <a:rPr lang="en-GB" smtClean="0"/>
-              <a:t>03/05/2026</a:t>
+              <a:t>07/05/2026</a:t>
             </a:fld>
             <a:endParaRPr lang="en-GB"/>
           </a:p>
@@ -941,7 +941,7 @@
           <a:p>
             <a:fld id="{31DCF8F9-FE1E-467E-9B82-0FEB758F2FA6}" type="datetime1">
               <a:rPr lang="en-US" smtClean="0"/>
-              <a:t>5/3/2026</a:t>
+              <a:t>5/7/2026</a:t>
             </a:fld>
             <a:endParaRPr lang="en-US" dirty="0"/>
           </a:p>
@@ -1311,7 +1311,7 @@
           <a:p>
             <a:fld id="{5CAAE393-D011-4B55-A9B6-0BBC79EF96B0}" type="datetime1">
               <a:rPr lang="en-US" smtClean="0"/>
-              <a:t>5/3/2026</a:t>
+              <a:t>5/7/2026</a:t>
             </a:fld>
             <a:endParaRPr lang="en-US"/>
           </a:p>
@@ -1520,7 +1520,7 @@
           <a:p>
             <a:fld id="{8ACD0C2F-F497-4247-8BB2-5746400D850B}" type="datetime1">
               <a:rPr lang="en-US" smtClean="0"/>
-              <a:t>5/3/2026</a:t>
+              <a:t>5/7/2026</a:t>
             </a:fld>
             <a:endParaRPr lang="en-US"/>
           </a:p>
@@ -1990,7 +1990,7 @@
           <a:p>
             <a:fld id="{6219CF75-0ECC-4E76-B636-3ABF46261502}" type="datetime1">
               <a:rPr lang="en-US" smtClean="0"/>
-              <a:t>5/3/2026</a:t>
+              <a:t>5/7/2026</a:t>
             </a:fld>
             <a:endParaRPr lang="en-US"/>
           </a:p>
@@ -2444,7 +2444,7 @@
           <a:p>
             <a:fld id="{8D14E8BD-E6E8-42B0-9E1C-58D2F9C64A0C}" type="datetime1">
               <a:rPr lang="en-US" smtClean="0"/>
-              <a:t>5/3/2026</a:t>
+              <a:t>5/7/2026</a:t>
             </a:fld>
             <a:endParaRPr lang="en-US"/>
           </a:p>
@@ -2976,7 +2976,7 @@
           <a:p>
             <a:fld id="{D7AFBA47-0BC8-4C75-9B10-88B9F496CCB1}" type="datetime1">
               <a:rPr lang="en-US" smtClean="0"/>
-              <a:t>5/3/2026</a:t>
+              <a:t>5/7/2026</a:t>
             </a:fld>
             <a:endParaRPr lang="en-US"/>
           </a:p>
@@ -3675,7 +3675,7 @@
           <a:p>
             <a:fld id="{84512E72-AC33-43BA-BEE9-4FD4948C58D8}" type="datetime1">
               <a:rPr lang="en-US" smtClean="0"/>
-              <a:t>5/3/2026</a:t>
+              <a:t>5/7/2026</a:t>
             </a:fld>
             <a:endParaRPr lang="en-US"/>
           </a:p>
@@ -4004,7 +4004,7 @@
           <a:p>
             <a:fld id="{CB376718-59A8-49B1-AEC5-3662572A144D}" type="datetime1">
               <a:rPr lang="en-US" smtClean="0"/>
-              <a:t>5/3/2026</a:t>
+              <a:t>5/7/2026</a:t>
             </a:fld>
             <a:endParaRPr lang="en-US"/>
           </a:p>
@@ -4117,7 +4117,7 @@
           <a:p>
             <a:fld id="{284EC767-5C82-4733-81D6-0B6B22CAF0EE}" type="datetime1">
               <a:rPr lang="en-US" smtClean="0"/>
-              <a:t>5/3/2026</a:t>
+              <a:t>5/7/2026</a:t>
             </a:fld>
             <a:endParaRPr lang="en-US"/>
           </a:p>
@@ -4612,7 +4612,7 @@
           <a:p>
             <a:fld id="{E4D41E06-6C86-4754-846D-56519DFF1F50}" type="datetime1">
               <a:rPr lang="en-US" smtClean="0"/>
-              <a:t>5/3/2026</a:t>
+              <a:t>5/7/2026</a:t>
             </a:fld>
             <a:endParaRPr lang="en-US" dirty="0"/>
           </a:p>
@@ -5089,7 +5089,7 @@
           <a:p>
             <a:fld id="{6D8A39B2-B176-40DF-B22F-280C511548AF}" type="datetime1">
               <a:rPr lang="en-US" smtClean="0"/>
-              <a:t>5/3/2026</a:t>
+              <a:t>5/7/2026</a:t>
             </a:fld>
             <a:endParaRPr lang="en-US"/>
           </a:p>
@@ -5332,7 +5332,7 @@
           <a:p>
             <a:fld id="{80BAA1BC-C245-4537-A704-02F8919D151B}" type="datetime1">
               <a:rPr lang="en-US" smtClean="0"/>
-              <a:t>5/3/2026</a:t>
+              <a:t>5/7/2026</a:t>
             </a:fld>
             <a:endParaRPr lang="en-US"/>
           </a:p>
@@ -10128,14 +10128,6 @@
 </file>
 
 <file path=customXml/item2.xml><?xml version="1.0" encoding="utf-8"?>
-<p:properties xmlns:p="http://schemas.microsoft.com/office/2006/metadata/properties" xmlns:xsi="http://www.w3.org/2001/XMLSchema-instance" xmlns:pc="http://schemas.microsoft.com/office/infopath/2007/PartnerControls">
-  <documentManagement>
-    <_activity xmlns="877093f4-30fb-4bf8-acd9-a0f957f1070d" xsi:nil="true"/>
-  </documentManagement>
-</p:properties>
-</file>
-
-<file path=customXml/item3.xml><?xml version="1.0" encoding="utf-8"?>
 <ct:contentTypeSchema xmlns:ct="http://schemas.microsoft.com/office/2006/metadata/contentType" xmlns:ma="http://schemas.microsoft.com/office/2006/metadata/properties/metaAttributes" ct:_="" ma:_="" ma:contentTypeName="Documento" ma:contentTypeID="0x01010042DCE3FE76873C43B4285687C17A7E08" ma:contentTypeVersion="10" ma:contentTypeDescription="Crear nuevo documento." ma:contentTypeScope="" ma:versionID="c076f5225479be130ea1a8c7ea941239">
   <xsd:schema xmlns:xsd="http://www.w3.org/2001/XMLSchema" xmlns:xs="http://www.w3.org/2001/XMLSchema" xmlns:p="http://schemas.microsoft.com/office/2006/metadata/properties" xmlns:ns3="877093f4-30fb-4bf8-acd9-a0f957f1070d" targetNamespace="http://schemas.microsoft.com/office/2006/metadata/properties" ma:root="true" ma:fieldsID="eda9f15d7ad6cd504e91494e3d190b94" ns3:_="">
     <xsd:import namespace="877093f4-30fb-4bf8-acd9-a0f957f1070d"/>
@@ -10317,6 +10309,14 @@
 </ct:contentTypeSchema>
 </file>
 
+<file path=customXml/item3.xml><?xml version="1.0" encoding="utf-8"?>
+<p:properties xmlns:p="http://schemas.microsoft.com/office/2006/metadata/properties" xmlns:xsi="http://www.w3.org/2001/XMLSchema-instance" xmlns:pc="http://schemas.microsoft.com/office/infopath/2007/PartnerControls">
+  <documentManagement>
+    <_activity xmlns="877093f4-30fb-4bf8-acd9-a0f957f1070d" xsi:nil="true"/>
+  </documentManagement>
+</p:properties>
+</file>
+
 <file path=customXml/itemProps1.xml><?xml version="1.0" encoding="utf-8"?>
 <ds:datastoreItem xmlns:ds="http://schemas.openxmlformats.org/officeDocument/2006/customXml" ds:itemID="{04171512-FDE1-4E49-B7EA-58AD2B333724}">
   <ds:schemaRefs>
@@ -10326,22 +10326,6 @@
 </file>
 
 <file path=customXml/itemProps2.xml><?xml version="1.0" encoding="utf-8"?>
-<ds:datastoreItem xmlns:ds="http://schemas.openxmlformats.org/officeDocument/2006/customXml" ds:itemID="{4FBF3923-D9E5-4962-BBB8-690B0ABC4F42}">
-  <ds:schemaRefs>
-    <ds:schemaRef ds:uri="http://purl.org/dc/elements/1.1/"/>
-    <ds:schemaRef ds:uri="http://schemas.microsoft.com/office/2006/documentManagement/types"/>
-    <ds:schemaRef ds:uri="http://www.w3.org/XML/1998/namespace"/>
-    <ds:schemaRef ds:uri="http://purl.org/dc/dcmitype/"/>
-    <ds:schemaRef ds:uri="http://schemas.openxmlformats.org/package/2006/metadata/core-properties"/>
-    <ds:schemaRef ds:uri="http://purl.org/dc/terms/"/>
-    <ds:schemaRef ds:uri="http://schemas.microsoft.com/office/2006/metadata/properties"/>
-    <ds:schemaRef ds:uri="http://schemas.microsoft.com/office/infopath/2007/PartnerControls"/>
-    <ds:schemaRef ds:uri="877093f4-30fb-4bf8-acd9-a0f957f1070d"/>
-  </ds:schemaRefs>
-</ds:datastoreItem>
-</file>
-
-<file path=customXml/itemProps3.xml><?xml version="1.0" encoding="utf-8"?>
 <ds:datastoreItem xmlns:ds="http://schemas.openxmlformats.org/officeDocument/2006/customXml" ds:itemID="{63C32CC2-E5F1-420E-B7EC-D49ED5434D9E}">
   <ds:schemaRefs>
     <ds:schemaRef ds:uri="http://schemas.microsoft.com/office/2006/metadata/contentType"/>
@@ -10357,4 +10341,20 @@
     <ds:schemaRef ds:uri="http://schemas.microsoft.com/internal/obd"/>
   </ds:schemaRefs>
 </ds:datastoreItem>
+</file>
+
+<file path=customXml/itemProps3.xml><?xml version="1.0" encoding="utf-8"?>
+<ds:datastoreItem xmlns:ds="http://schemas.openxmlformats.org/officeDocument/2006/customXml" ds:itemID="{4FBF3923-D9E5-4962-BBB8-690B0ABC4F42}">
+  <ds:schemaRefs>
+    <ds:schemaRef ds:uri="http://purl.org/dc/elements/1.1/"/>
+    <ds:schemaRef ds:uri="http://schemas.microsoft.com/office/2006/documentManagement/types"/>
+    <ds:schemaRef ds:uri="http://www.w3.org/XML/1998/namespace"/>
+    <ds:schemaRef ds:uri="http://purl.org/dc/dcmitype/"/>
+    <ds:schemaRef ds:uri="http://schemas.openxmlformats.org/package/2006/metadata/core-properties"/>
+    <ds:schemaRef ds:uri="http://purl.org/dc/terms/"/>
+    <ds:schemaRef ds:uri="http://schemas.microsoft.com/office/2006/metadata/properties"/>
+    <ds:schemaRef ds:uri="http://schemas.microsoft.com/office/infopath/2007/PartnerControls"/>
+    <ds:schemaRef ds:uri="877093f4-30fb-4bf8-acd9-a0f957f1070d"/>
+  </ds:schemaRefs>
+</ds:datastoreItem>
 </file>